--- a/docs/presentation.pptx
+++ b/docs/presentation.pptx
@@ -2785,7 +2785,7 @@
                 <a:ea typeface="Calibri" pitchFamily="34" charset="-122"/>
                 <a:cs typeface="Calibri" pitchFamily="34" charset="-120"/>
               </a:rPr>
-              <a:t>Per-tenant LLM key — no platform-level fallback</a:t>
+              <a:t>Per-tenant LLM key &amp; bring-your-own S3 storage</a:t>
             </a:r>
             <a:endParaRPr lang="en-US" sz="1300" dirty="0"/>
           </a:p>
@@ -2824,7 +2824,7 @@
                 <a:ea typeface="Calibri" pitchFamily="34" charset="-122"/>
                 <a:cs typeface="Calibri" pitchFamily="34" charset="-120"/>
               </a:rPr>
-              <a:t>Each tenant owns their AI spend; shared-key cost leakage and quota contention are structurally impossible</a:t>
+              <a:t>Each tenant owns their AI spend and document storage. S3 bucket, region, and credentials are configured per-tenant and encrypted at rest</a:t>
             </a:r>
             <a:endParaRPr lang="en-US" sz="1200" dirty="0"/>
           </a:p>
@@ -9909,7 +9909,7 @@
                 <a:ea typeface="Calibri" pitchFamily="34" charset="-122"/>
                 <a:cs typeface="Calibri" pitchFamily="34" charset="-120"/>
               </a:rPr>
-              <a:t>Per-tenant AI config: provider, model, key, endpoint</a:t>
+              <a:t>Per-tenant AI &amp; S3 config: provider, model, key, endpoint, storage</a:t>
             </a:r>
             <a:endParaRPr lang="en-US" sz="1150" dirty="0"/>
           </a:p>
@@ -10691,7 +10691,7 @@
                 <a:ea typeface="Calibri" pitchFamily="34" charset="-122"/>
                 <a:cs typeface="Calibri" pitchFamily="34" charset="-120"/>
               </a:rPr>
-              <a:t>LLM API keys encrypted at rest with AES-256-GCM (random 12-byte IV)  ·  Webhook HMAC-SHA-256 verified  ·  SSRF protection on all URL fetches</a:t>
+              <a:t>LLM API keys encrypted at rest with AES-256-GCM (random 12-byte IV)  ·  S3 credentials encrypted at rest  ·  Webhook HMAC-SHA-256 verified  ·  SSRF protection on all URL fetches</a:t>
             </a:r>
             <a:endParaRPr lang="en-US" sz="1100" dirty="0"/>
           </a:p>
